--- a/slides/talk-sdd.pptx
+++ b/slides/talk-sdd.pptx
@@ -11598,8 +11598,8 @@
         </p:nvSpPr>
         <p:spPr>
           <a:xfrm>
-            <a:off x="822960" y="2560320"/>
-            <a:ext cx="10543032" cy="1737360"/>
+            <a:off x="822960" y="2606040"/>
+            <a:ext cx="10543032" cy="685800"/>
           </a:xfrm>
           <a:prstGeom prst="rect">
             <a:avLst/>
@@ -11655,6 +11655,28 @@
             </a:r>
             <a:endParaRPr lang="en-US" sz="3600" dirty="0"/>
           </a:p>
+        </p:txBody>
+      </p:sp>
+      <p:sp>
+        <p:nvSpPr>
+          <p:cNvPr id="4" name="Text 2"/>
+          <p:cNvSpPr/>
+          <p:nvPr/>
+        </p:nvSpPr>
+        <p:spPr>
+          <a:xfrm>
+            <a:off x="822960" y="3310128"/>
+            <a:ext cx="10543032" cy="685800"/>
+          </a:xfrm>
+          <a:prstGeom prst="rect">
+            <a:avLst/>
+          </a:prstGeom>
+          <a:noFill/>
+          <a:ln/>
+        </p:spPr>
+        <p:txBody>
+          <a:bodyPr wrap="square" lIns="0" tIns="0" rIns="0" bIns="0" rtlCol="0" anchor="ctr"/>
+          <a:lstStyle/>
           <a:p>
             <a:pPr algn="ctr" indent="0" marL="0">
               <a:buNone/>
@@ -11670,9 +11692,6 @@
               </a:rPr>
               <a:t>sem </a:t>
             </a:r>
-            <a:endParaRPr lang="en-US" sz="3600" dirty="0"/>
-          </a:p>
-          <a:p>
             <a:pPr algn="ctr" indent="0" marL="0">
               <a:buNone/>
             </a:pPr>
